--- a/prezentacie/t27w.pptx
+++ b/prezentacie/t27w.pptx
@@ -5394,7 +5394,7 @@
             </a:r>
             <a:r>
               <a:rPr lang="sk-SK" dirty="0"/>
-              <a:t> relačná databáza. Nepotrebujeme žiaden samostatný server, ale databáza beží priamo v našom programe.</a:t>
+              <a:t> relačná databáza. Nepotrebujeme žiadny samostatný server, ale databáza beží priamo v našom programe.</a:t>
             </a:r>
           </a:p>
           <a:p>
